--- a/Fase 3/Presentación FINAL.pptx
+++ b/Fase 3/Presentación FINAL.pptx
@@ -1924,7 +1924,7 @@
       </p:grpSpPr>
       <p:sp>
         <p:nvSpPr>
-          <p:cNvPr id="268" name="Google Shape;268;g39722f22f86_0_172:notes"/>
+          <p:cNvPr id="268" name="Google Shape;268;g3ef6c5cd001_0_0:notes"/>
           <p:cNvSpPr/>
           <p:nvPr>
             <p:ph idx="2" type="sldImg"/>
@@ -1959,7 +1959,7 @@
       </p:sp>
       <p:sp>
         <p:nvSpPr>
-          <p:cNvPr id="269" name="Google Shape;269;g39722f22f86_0_172:notes"/>
+          <p:cNvPr id="269" name="Google Shape;269;g3ef6c5cd001_0_0:notes"/>
           <p:cNvSpPr txBox="1"/>
           <p:nvPr>
             <p:ph idx="1" type="body"/>
@@ -2009,7 +2009,7 @@
   <p:cSld>
     <p:spTree>
       <p:nvGrpSpPr>
-        <p:cNvPr id="280" name="Shape 280"/>
+        <p:cNvPr id="274" name="Shape 274"/>
         <p:cNvGrpSpPr/>
         <p:nvPr/>
       </p:nvGrpSpPr>
@@ -2023,7 +2023,7 @@
       </p:grpSpPr>
       <p:sp>
         <p:nvSpPr>
-          <p:cNvPr id="281" name="Google Shape;281;g3ef6c5cd001_0_0:notes"/>
+          <p:cNvPr id="275" name="Google Shape;275;g3de367742f3_0_31:notes"/>
           <p:cNvSpPr/>
           <p:nvPr>
             <p:ph idx="2" type="sldImg"/>
@@ -2058,7 +2058,7 @@
       </p:sp>
       <p:sp>
         <p:nvSpPr>
-          <p:cNvPr id="282" name="Google Shape;282;g3ef6c5cd001_0_0:notes"/>
+          <p:cNvPr id="276" name="Google Shape;276;g3de367742f3_0_31:notes"/>
           <p:cNvSpPr txBox="1"/>
           <p:nvPr>
             <p:ph idx="1" type="body"/>
@@ -2108,7 +2108,7 @@
   <p:cSld>
     <p:spTree>
       <p:nvGrpSpPr>
-        <p:cNvPr id="287" name="Shape 287"/>
+        <p:cNvPr id="281" name="Shape 281"/>
         <p:cNvGrpSpPr/>
         <p:nvPr/>
       </p:nvGrpSpPr>
@@ -2122,7 +2122,7 @@
       </p:grpSpPr>
       <p:sp>
         <p:nvSpPr>
-          <p:cNvPr id="288" name="Google Shape;288;g3de367742f3_0_31:notes"/>
+          <p:cNvPr id="282" name="Google Shape;282;g3f30ded75bf_0_0:notes"/>
           <p:cNvSpPr/>
           <p:nvPr>
             <p:ph idx="2" type="sldImg"/>
@@ -2157,7 +2157,7 @@
       </p:sp>
       <p:sp>
         <p:nvSpPr>
-          <p:cNvPr id="289" name="Google Shape;289;g3de367742f3_0_31:notes"/>
+          <p:cNvPr id="283" name="Google Shape;283;g3f30ded75bf_0_0:notes"/>
           <p:cNvSpPr txBox="1"/>
           <p:nvPr>
             <p:ph idx="1" type="body"/>
@@ -2207,7 +2207,7 @@
   <p:cSld>
     <p:spTree>
       <p:nvGrpSpPr>
-        <p:cNvPr id="294" name="Shape 294"/>
+        <p:cNvPr id="287" name="Shape 287"/>
         <p:cNvGrpSpPr/>
         <p:nvPr/>
       </p:nvGrpSpPr>
@@ -2221,7 +2221,7 @@
       </p:grpSpPr>
       <p:sp>
         <p:nvSpPr>
-          <p:cNvPr id="295" name="Google Shape;295;g3ef6c5cd001_3_0:notes"/>
+          <p:cNvPr id="288" name="Google Shape;288;g3ef6c5cd001_3_0:notes"/>
           <p:cNvSpPr/>
           <p:nvPr>
             <p:ph idx="2" type="sldImg"/>
@@ -2256,7 +2256,7 @@
       </p:sp>
       <p:sp>
         <p:nvSpPr>
-          <p:cNvPr id="296" name="Google Shape;296;g3ef6c5cd001_3_0:notes"/>
+          <p:cNvPr id="289" name="Google Shape;289;g3ef6c5cd001_3_0:notes"/>
           <p:cNvSpPr txBox="1"/>
           <p:nvPr>
             <p:ph idx="1" type="body"/>
@@ -11358,7 +11358,7 @@
             <a:tbl>
               <a:tblPr>
                 <a:noFill/>
-                <a:tableStyleId>{FF6A99FB-A25B-4E06-807F-EB956F5D355E}</a:tableStyleId>
+                <a:tableStyleId>{A22A6C49-D09A-436A-8785-5FEA15467169}</a:tableStyleId>
               </a:tblPr>
               <a:tblGrid>
                 <a:gridCol w="2514400"/>
@@ -12115,7 +12115,7 @@
             <a:tbl>
               <a:tblPr bandRow="1">
                 <a:noFill/>
-                <a:tableStyleId>{483BCD93-6F9B-4AEE-985E-E3DCE8DAF3C4}</a:tableStyleId>
+                <a:tableStyleId>{91146979-946A-4DF6-A76B-758DD54EFE7F}</a:tableStyleId>
               </a:tblPr>
               <a:tblGrid>
                 <a:gridCol w="537200"/>
@@ -12640,7 +12640,7 @@
         <p:spPr>
           <a:xfrm>
             <a:off x="330250" y="528650"/>
-            <a:ext cx="3594600" cy="1969800"/>
+            <a:ext cx="3594600" cy="2164500"/>
           </a:xfrm>
           <a:prstGeom prst="rect">
             <a:avLst/>
@@ -12774,7 +12774,27 @@
               <a:rPr lang="es" sz="1100"/>
               <a:t>Registro e inicio de sesión</a:t>
             </a:r>
-            <a:endParaRPr b="1" sz="1000"/>
+            <a:endParaRPr sz="1100"/>
+          </a:p>
+          <a:p>
+            <a:pPr indent="-298450" lvl="0" marL="457200" rtl="0" algn="l">
+              <a:lnSpc>
+                <a:spcPct val="115000"/>
+              </a:lnSpc>
+              <a:spcBef>
+                <a:spcPts val="0"/>
+              </a:spcBef>
+              <a:spcAft>
+                <a:spcPts val="0"/>
+              </a:spcAft>
+              <a:buSzPts val="1100"/>
+              <a:buChar char="●"/>
+            </a:pPr>
+            <a:r>
+              <a:rPr lang="es" sz="1100"/>
+              <a:t>Registro de vivienda</a:t>
+            </a:r>
+            <a:endParaRPr sz="1100"/>
           </a:p>
         </p:txBody>
       </p:sp>
@@ -14424,388 +14444,6 @@
       <p:sp>
         <p:nvSpPr>
           <p:cNvPr id="271" name="Google Shape;271;p32"/>
-          <p:cNvSpPr/>
-          <p:nvPr/>
-        </p:nvSpPr>
-        <p:spPr>
-          <a:xfrm>
-            <a:off x="4855200" y="1911875"/>
-            <a:ext cx="2371800" cy="2529600"/>
-          </a:xfrm>
-          <a:prstGeom prst="rect">
-            <a:avLst/>
-          </a:prstGeom>
-          <a:solidFill>
-            <a:schemeClr val="dk1"/>
-          </a:solidFill>
-          <a:ln cap="flat" cmpd="sng" w="9525">
-            <a:solidFill>
-              <a:schemeClr val="dk2"/>
-            </a:solidFill>
-            <a:prstDash val="solid"/>
-            <a:round/>
-            <a:headEnd len="sm" w="sm" type="none"/>
-            <a:tailEnd len="sm" w="sm" type="none"/>
-          </a:ln>
-        </p:spPr>
-        <p:txBody>
-          <a:bodyPr anchorCtr="0" anchor="ctr" bIns="91425" lIns="91425" spcFirstLastPara="1" rIns="91425" wrap="square" tIns="91425">
-            <a:noAutofit/>
-          </a:bodyPr>
-          <a:lstStyle/>
-          <a:p>
-            <a:pPr indent="0" lvl="0" marL="0" rtl="0" algn="ctr">
-              <a:spcBef>
-                <a:spcPts val="0"/>
-              </a:spcBef>
-              <a:spcAft>
-                <a:spcPts val="0"/>
-              </a:spcAft>
-              <a:buNone/>
-            </a:pPr>
-            <a:r>
-              <a:t/>
-            </a:r>
-            <a:endParaRPr>
-              <a:latin typeface="Calibri"/>
-              <a:ea typeface="Calibri"/>
-              <a:cs typeface="Calibri"/>
-              <a:sym typeface="Calibri"/>
-            </a:endParaRPr>
-          </a:p>
-        </p:txBody>
-      </p:sp>
-      <p:sp>
-        <p:nvSpPr>
-          <p:cNvPr id="272" name="Google Shape;272;p32"/>
-          <p:cNvSpPr/>
-          <p:nvPr/>
-        </p:nvSpPr>
-        <p:spPr>
-          <a:xfrm>
-            <a:off x="1620675" y="1911875"/>
-            <a:ext cx="2371800" cy="2529600"/>
-          </a:xfrm>
-          <a:prstGeom prst="rect">
-            <a:avLst/>
-          </a:prstGeom>
-          <a:solidFill>
-            <a:schemeClr val="dk1"/>
-          </a:solidFill>
-          <a:ln cap="flat" cmpd="sng" w="9525">
-            <a:solidFill>
-              <a:schemeClr val="dk2"/>
-            </a:solidFill>
-            <a:prstDash val="solid"/>
-            <a:round/>
-            <a:headEnd len="sm" w="sm" type="none"/>
-            <a:tailEnd len="sm" w="sm" type="none"/>
-          </a:ln>
-        </p:spPr>
-        <p:txBody>
-          <a:bodyPr anchorCtr="0" anchor="ctr" bIns="91425" lIns="91425" spcFirstLastPara="1" rIns="91425" wrap="square" tIns="91425">
-            <a:noAutofit/>
-          </a:bodyPr>
-          <a:lstStyle/>
-          <a:p>
-            <a:pPr indent="0" lvl="0" marL="0" rtl="0" algn="ctr">
-              <a:spcBef>
-                <a:spcPts val="0"/>
-              </a:spcBef>
-              <a:spcAft>
-                <a:spcPts val="0"/>
-              </a:spcAft>
-              <a:buNone/>
-            </a:pPr>
-            <a:r>
-              <a:t/>
-            </a:r>
-            <a:endParaRPr>
-              <a:latin typeface="Calibri"/>
-              <a:ea typeface="Calibri"/>
-              <a:cs typeface="Calibri"/>
-              <a:sym typeface="Calibri"/>
-            </a:endParaRPr>
-          </a:p>
-        </p:txBody>
-      </p:sp>
-      <p:sp>
-        <p:nvSpPr>
-          <p:cNvPr id="273" name="Google Shape;273;p32"/>
-          <p:cNvSpPr txBox="1"/>
-          <p:nvPr>
-            <p:ph type="title"/>
-          </p:nvPr>
-        </p:nvSpPr>
-        <p:spPr>
-          <a:xfrm>
-            <a:off x="1650950" y="480750"/>
-            <a:ext cx="5321700" cy="744300"/>
-          </a:xfrm>
-          <a:prstGeom prst="rect">
-            <a:avLst/>
-          </a:prstGeom>
-        </p:spPr>
-        <p:txBody>
-          <a:bodyPr anchorCtr="0" anchor="ctr" bIns="91425" lIns="91425" spcFirstLastPara="1" rIns="91425" wrap="square" tIns="91425">
-            <a:normAutofit/>
-          </a:bodyPr>
-          <a:lstStyle/>
-          <a:p>
-            <a:pPr indent="0" lvl="0" marL="0" rtl="0" algn="ctr">
-              <a:spcBef>
-                <a:spcPts val="0"/>
-              </a:spcBef>
-              <a:spcAft>
-                <a:spcPts val="0"/>
-              </a:spcAft>
-              <a:buNone/>
-            </a:pPr>
-            <a:r>
-              <a:rPr lang="es"/>
-              <a:t>Desarrollo</a:t>
-            </a:r>
-            <a:endParaRPr/>
-          </a:p>
-        </p:txBody>
-      </p:sp>
-      <p:pic>
-        <p:nvPicPr>
-          <p:cNvPr id="274" name="Google Shape;274;p32"/>
-          <p:cNvPicPr preferRelativeResize="0"/>
-          <p:nvPr/>
-        </p:nvPicPr>
-        <p:blipFill rotWithShape="1">
-          <a:blip r:embed="rId3">
-            <a:alphaModFix/>
-          </a:blip>
-          <a:srcRect b="35831" l="0" r="0" t="37508"/>
-          <a:stretch/>
-        </p:blipFill>
-        <p:spPr>
-          <a:xfrm>
-            <a:off x="5202075" y="2226138"/>
-            <a:ext cx="1678013" cy="447400"/>
-          </a:xfrm>
-          <a:prstGeom prst="rect">
-            <a:avLst/>
-          </a:prstGeom>
-          <a:noFill/>
-          <a:ln>
-            <a:noFill/>
-          </a:ln>
-        </p:spPr>
-      </p:pic>
-      <p:pic>
-        <p:nvPicPr>
-          <p:cNvPr id="275" name="Google Shape;275;p32"/>
-          <p:cNvPicPr preferRelativeResize="0"/>
-          <p:nvPr/>
-        </p:nvPicPr>
-        <p:blipFill rotWithShape="1">
-          <a:blip r:embed="rId4">
-            <a:alphaModFix/>
-          </a:blip>
-          <a:srcRect b="37101" l="11364" r="8495" t="37096"/>
-          <a:stretch/>
-        </p:blipFill>
-        <p:spPr>
-          <a:xfrm>
-            <a:off x="2111603" y="2226150"/>
-            <a:ext cx="1389647" cy="447399"/>
-          </a:xfrm>
-          <a:prstGeom prst="rect">
-            <a:avLst/>
-          </a:prstGeom>
-          <a:noFill/>
-          <a:ln>
-            <a:noFill/>
-          </a:ln>
-        </p:spPr>
-      </p:pic>
-      <p:pic>
-        <p:nvPicPr>
-          <p:cNvPr id="276" name="Google Shape;276;p32"/>
-          <p:cNvPicPr preferRelativeResize="0"/>
-          <p:nvPr/>
-        </p:nvPicPr>
-        <p:blipFill rotWithShape="1">
-          <a:blip r:embed="rId5">
-            <a:alphaModFix/>
-          </a:blip>
-          <a:srcRect b="7002" l="3030" r="2568" t="7506"/>
-          <a:stretch/>
-        </p:blipFill>
-        <p:spPr>
-          <a:xfrm>
-            <a:off x="1860798" y="2933963"/>
-            <a:ext cx="1891275" cy="685155"/>
-          </a:xfrm>
-          <a:prstGeom prst="rect">
-            <a:avLst/>
-          </a:prstGeom>
-          <a:noFill/>
-          <a:ln>
-            <a:noFill/>
-          </a:ln>
-        </p:spPr>
-      </p:pic>
-      <p:sp>
-        <p:nvSpPr>
-          <p:cNvPr id="277" name="Google Shape;277;p32"/>
-          <p:cNvSpPr txBox="1"/>
-          <p:nvPr>
-            <p:ph type="title"/>
-          </p:nvPr>
-        </p:nvSpPr>
-        <p:spPr>
-          <a:xfrm>
-            <a:off x="1620525" y="1464575"/>
-            <a:ext cx="2371800" cy="447300"/>
-          </a:xfrm>
-          <a:prstGeom prst="rect">
-            <a:avLst/>
-          </a:prstGeom>
-          <a:ln cap="flat" cmpd="sng" w="9525">
-            <a:solidFill>
-              <a:srgbClr val="000000"/>
-            </a:solidFill>
-            <a:prstDash val="solid"/>
-            <a:round/>
-            <a:headEnd len="sm" w="sm" type="none"/>
-            <a:tailEnd len="sm" w="sm" type="none"/>
-          </a:ln>
-        </p:spPr>
-        <p:txBody>
-          <a:bodyPr anchorCtr="0" anchor="ctr" bIns="91425" lIns="91425" spcFirstLastPara="1" rIns="91425" wrap="square" tIns="91425">
-            <a:noAutofit/>
-          </a:bodyPr>
-          <a:lstStyle/>
-          <a:p>
-            <a:pPr indent="0" lvl="0" marL="0" rtl="0" algn="ctr">
-              <a:spcBef>
-                <a:spcPts val="0"/>
-              </a:spcBef>
-              <a:spcAft>
-                <a:spcPts val="0"/>
-              </a:spcAft>
-              <a:buSzPts val="990"/>
-              <a:buNone/>
-            </a:pPr>
-            <a:r>
-              <a:rPr lang="es" sz="1880"/>
-              <a:t>Front </a:t>
-            </a:r>
-            <a:endParaRPr sz="1880"/>
-          </a:p>
-        </p:txBody>
-      </p:sp>
-      <p:sp>
-        <p:nvSpPr>
-          <p:cNvPr id="278" name="Google Shape;278;p32"/>
-          <p:cNvSpPr txBox="1"/>
-          <p:nvPr>
-            <p:ph type="title"/>
-          </p:nvPr>
-        </p:nvSpPr>
-        <p:spPr>
-          <a:xfrm>
-            <a:off x="4855188" y="1464575"/>
-            <a:ext cx="2371800" cy="447300"/>
-          </a:xfrm>
-          <a:prstGeom prst="rect">
-            <a:avLst/>
-          </a:prstGeom>
-          <a:ln cap="flat" cmpd="sng" w="9525">
-            <a:solidFill>
-              <a:srgbClr val="000000"/>
-            </a:solidFill>
-            <a:prstDash val="solid"/>
-            <a:round/>
-            <a:headEnd len="sm" w="sm" type="none"/>
-            <a:tailEnd len="sm" w="sm" type="none"/>
-          </a:ln>
-        </p:spPr>
-        <p:txBody>
-          <a:bodyPr anchorCtr="0" anchor="ctr" bIns="91425" lIns="91425" spcFirstLastPara="1" rIns="91425" wrap="square" tIns="91425">
-            <a:noAutofit/>
-          </a:bodyPr>
-          <a:lstStyle/>
-          <a:p>
-            <a:pPr indent="0" lvl="0" marL="0" rtl="0" algn="ctr">
-              <a:spcBef>
-                <a:spcPts val="0"/>
-              </a:spcBef>
-              <a:spcAft>
-                <a:spcPts val="0"/>
-              </a:spcAft>
-              <a:buSzPts val="990"/>
-              <a:buNone/>
-            </a:pPr>
-            <a:r>
-              <a:rPr lang="es" sz="1880"/>
-              <a:t>Base de datos</a:t>
-            </a:r>
-            <a:endParaRPr sz="1880"/>
-          </a:p>
-        </p:txBody>
-      </p:sp>
-      <p:pic>
-        <p:nvPicPr>
-          <p:cNvPr id="279" name="Google Shape;279;p32"/>
-          <p:cNvPicPr preferRelativeResize="0"/>
-          <p:nvPr/>
-        </p:nvPicPr>
-        <p:blipFill>
-          <a:blip r:embed="rId6">
-            <a:alphaModFix/>
-          </a:blip>
-          <a:stretch>
-            <a:fillRect/>
-          </a:stretch>
-        </p:blipFill>
-        <p:spPr>
-          <a:xfrm>
-            <a:off x="5336267" y="2852625"/>
-            <a:ext cx="1318075" cy="1318145"/>
-          </a:xfrm>
-          <a:prstGeom prst="rect">
-            <a:avLst/>
-          </a:prstGeom>
-          <a:noFill/>
-          <a:ln>
-            <a:noFill/>
-          </a:ln>
-        </p:spPr>
-      </p:pic>
-    </p:spTree>
-  </p:cSld>
-  <p:clrMapOvr>
-    <a:masterClrMapping/>
-  </p:clrMapOvr>
-</p:sld>
-</file>
-
-<file path=ppt/slides/slide21.xml><?xml version="1.0" encoding="utf-8"?>
-<p:sld xmlns:a="http://schemas.openxmlformats.org/drawingml/2006/main" xmlns:r="http://schemas.openxmlformats.org/officeDocument/2006/relationships" xmlns:mc="http://schemas.openxmlformats.org/markup-compatibility/2006" xmlns:mv="urn:schemas-microsoft-com:mac:vml" xmlns:p="http://schemas.openxmlformats.org/presentationml/2006/main" xmlns:c="http://schemas.openxmlformats.org/drawingml/2006/chart" xmlns:dgm="http://schemas.openxmlformats.org/drawingml/2006/diagram" xmlns:o="urn:schemas-microsoft-com:office:office" xmlns:v="urn:schemas-microsoft-com:vml" xmlns:pvml="urn:schemas-microsoft-com:office:powerpoint" xmlns:com="http://schemas.openxmlformats.org/drawingml/2006/compatibility" xmlns:p14="http://schemas.microsoft.com/office/powerpoint/2010/main" xmlns:p15="http://schemas.microsoft.com/office/powerpoint/2012/main" xmlns:ahyp="http://schemas.microsoft.com/office/drawing/2018/hyperlinkcolor">
-  <p:cSld>
-    <p:spTree>
-      <p:nvGrpSpPr>
-        <p:cNvPr id="283" name="Shape 283"/>
-        <p:cNvGrpSpPr/>
-        <p:nvPr/>
-      </p:nvGrpSpPr>
-      <p:grpSpPr>
-        <a:xfrm>
-          <a:off x="0" y="0"/>
-          <a:ext cx="0" cy="0"/>
-          <a:chOff x="0" y="0"/>
-          <a:chExt cx="0" cy="0"/>
-        </a:xfrm>
-      </p:grpSpPr>
-      <p:sp>
-        <p:nvSpPr>
-          <p:cNvPr id="284" name="Google Shape;284;p33"/>
           <p:cNvSpPr txBox="1"/>
           <p:nvPr>
             <p:ph type="title"/>
@@ -14845,7 +14483,7 @@
       </p:sp>
       <p:pic>
         <p:nvPicPr>
-          <p:cNvPr id="285" name="Google Shape;285;p33" title="18252029.png"/>
+          <p:cNvPr id="272" name="Google Shape;272;p32" title="18252029.png"/>
           <p:cNvPicPr preferRelativeResize="0"/>
           <p:nvPr/>
         </p:nvPicPr>
@@ -14873,7 +14511,7 @@
       </p:pic>
       <p:sp>
         <p:nvSpPr>
-          <p:cNvPr id="286" name="Google Shape;286;p33"/>
+          <p:cNvPr id="273" name="Google Shape;273;p32"/>
           <p:cNvSpPr txBox="1"/>
           <p:nvPr/>
         </p:nvSpPr>
@@ -15070,12 +14708,12 @@
 </p:sld>
 </file>
 
-<file path=ppt/slides/slide22.xml><?xml version="1.0" encoding="utf-8"?>
+<file path=ppt/slides/slide21.xml><?xml version="1.0" encoding="utf-8"?>
 <p:sld xmlns:a="http://schemas.openxmlformats.org/drawingml/2006/main" xmlns:r="http://schemas.openxmlformats.org/officeDocument/2006/relationships" xmlns:mc="http://schemas.openxmlformats.org/markup-compatibility/2006" xmlns:mv="urn:schemas-microsoft-com:mac:vml" xmlns:p="http://schemas.openxmlformats.org/presentationml/2006/main" xmlns:c="http://schemas.openxmlformats.org/drawingml/2006/chart" xmlns:dgm="http://schemas.openxmlformats.org/drawingml/2006/diagram" xmlns:o="urn:schemas-microsoft-com:office:office" xmlns:v="urn:schemas-microsoft-com:vml" xmlns:pvml="urn:schemas-microsoft-com:office:powerpoint" xmlns:com="http://schemas.openxmlformats.org/drawingml/2006/compatibility" xmlns:p14="http://schemas.microsoft.com/office/powerpoint/2010/main" xmlns:p15="http://schemas.microsoft.com/office/powerpoint/2012/main" xmlns:ahyp="http://schemas.microsoft.com/office/drawing/2018/hyperlinkcolor">
   <p:cSld>
     <p:spTree>
       <p:nvGrpSpPr>
-        <p:cNvPr id="290" name="Shape 290"/>
+        <p:cNvPr id="277" name="Shape 277"/>
         <p:cNvGrpSpPr/>
         <p:nvPr/>
       </p:nvGrpSpPr>
@@ -15089,7 +14727,7 @@
       </p:grpSpPr>
       <p:sp>
         <p:nvSpPr>
-          <p:cNvPr id="291" name="Google Shape;291;p34"/>
+          <p:cNvPr id="278" name="Google Shape;278;p33"/>
           <p:cNvSpPr txBox="1"/>
           <p:nvPr>
             <p:ph type="title"/>
@@ -15129,7 +14767,7 @@
       </p:sp>
       <p:graphicFrame>
         <p:nvGraphicFramePr>
-          <p:cNvPr id="292" name="Google Shape;292;p34"/>
+          <p:cNvPr id="279" name="Google Shape;279;p33"/>
           <p:cNvGraphicFramePr/>
           <p:nvPr/>
         </p:nvGraphicFramePr>
@@ -15142,7 +14780,7 @@
             <a:tbl>
               <a:tblPr>
                 <a:noFill/>
-                <a:tableStyleId>{FF6A99FB-A25B-4E06-807F-EB956F5D355E}</a:tableStyleId>
+                <a:tableStyleId>{A22A6C49-D09A-436A-8785-5FEA15467169}</a:tableStyleId>
               </a:tblPr>
               <a:tblGrid>
                 <a:gridCol w="1809750"/>
@@ -15448,7 +15086,7 @@
       </p:graphicFrame>
       <p:sp>
         <p:nvSpPr>
-          <p:cNvPr id="293" name="Google Shape;293;p34"/>
+          <p:cNvPr id="280" name="Google Shape;280;p33"/>
           <p:cNvSpPr txBox="1"/>
           <p:nvPr/>
         </p:nvSpPr>
@@ -15537,12 +15175,12 @@
 </p:sld>
 </file>
 
-<file path=ppt/slides/slide23.xml><?xml version="1.0" encoding="utf-8"?>
+<file path=ppt/slides/slide22.xml><?xml version="1.0" encoding="utf-8"?>
 <p:sld xmlns:a="http://schemas.openxmlformats.org/drawingml/2006/main" xmlns:r="http://schemas.openxmlformats.org/officeDocument/2006/relationships" xmlns:mc="http://schemas.openxmlformats.org/markup-compatibility/2006" xmlns:mv="urn:schemas-microsoft-com:mac:vml" xmlns:p="http://schemas.openxmlformats.org/presentationml/2006/main" xmlns:c="http://schemas.openxmlformats.org/drawingml/2006/chart" xmlns:dgm="http://schemas.openxmlformats.org/drawingml/2006/diagram" xmlns:o="urn:schemas-microsoft-com:office:office" xmlns:v="urn:schemas-microsoft-com:vml" xmlns:pvml="urn:schemas-microsoft-com:office:powerpoint" xmlns:com="http://schemas.openxmlformats.org/drawingml/2006/compatibility" xmlns:p14="http://schemas.microsoft.com/office/powerpoint/2010/main" xmlns:p15="http://schemas.microsoft.com/office/powerpoint/2012/main" xmlns:ahyp="http://schemas.microsoft.com/office/drawing/2018/hyperlinkcolor">
   <p:cSld>
     <p:spTree>
       <p:nvGrpSpPr>
-        <p:cNvPr id="297" name="Shape 297"/>
+        <p:cNvPr id="284" name="Shape 284"/>
         <p:cNvGrpSpPr/>
         <p:nvPr/>
       </p:nvGrpSpPr>
@@ -15556,7 +15194,100 @@
       </p:grpSpPr>
       <p:sp>
         <p:nvSpPr>
-          <p:cNvPr id="298" name="Google Shape;298;p35"/>
+          <p:cNvPr id="285" name="Google Shape;285;p34"/>
+          <p:cNvSpPr txBox="1"/>
+          <p:nvPr>
+            <p:ph type="title"/>
+          </p:nvPr>
+        </p:nvSpPr>
+        <p:spPr>
+          <a:xfrm>
+            <a:off x="1617075" y="472925"/>
+            <a:ext cx="5321700" cy="744300"/>
+          </a:xfrm>
+          <a:prstGeom prst="rect">
+            <a:avLst/>
+          </a:prstGeom>
+        </p:spPr>
+        <p:txBody>
+          <a:bodyPr anchorCtr="0" anchor="ctr" bIns="91425" lIns="91425" spcFirstLastPara="1" rIns="91425" wrap="square" tIns="91425">
+            <a:normAutofit/>
+          </a:bodyPr>
+          <a:lstStyle/>
+          <a:p>
+            <a:pPr indent="0" lvl="0" marL="0" rtl="0" algn="ctr">
+              <a:spcBef>
+                <a:spcPts val="0"/>
+              </a:spcBef>
+              <a:spcAft>
+                <a:spcPts val="0"/>
+              </a:spcAft>
+              <a:buNone/>
+            </a:pPr>
+            <a:r>
+              <a:rPr lang="es"/>
+              <a:t>EDT</a:t>
+            </a:r>
+            <a:endParaRPr/>
+          </a:p>
+        </p:txBody>
+      </p:sp>
+      <p:pic>
+        <p:nvPicPr>
+          <p:cNvPr id="286" name="Google Shape;286;p34" title="FINAL FINAL FINAL FINAL FINAL.png"/>
+          <p:cNvPicPr preferRelativeResize="0"/>
+          <p:nvPr/>
+        </p:nvPicPr>
+        <p:blipFill>
+          <a:blip r:embed="rId3">
+            <a:alphaModFix/>
+          </a:blip>
+          <a:stretch>
+            <a:fillRect/>
+          </a:stretch>
+        </p:blipFill>
+        <p:spPr>
+          <a:xfrm>
+            <a:off x="2396100" y="1600275"/>
+            <a:ext cx="4138250" cy="2511975"/>
+          </a:xfrm>
+          <a:prstGeom prst="rect">
+            <a:avLst/>
+          </a:prstGeom>
+          <a:noFill/>
+          <a:ln>
+            <a:noFill/>
+          </a:ln>
+        </p:spPr>
+      </p:pic>
+    </p:spTree>
+  </p:cSld>
+  <p:clrMapOvr>
+    <a:masterClrMapping/>
+  </p:clrMapOvr>
+</p:sld>
+</file>
+
+<file path=ppt/slides/slide23.xml><?xml version="1.0" encoding="utf-8"?>
+<p:sld xmlns:a="http://schemas.openxmlformats.org/drawingml/2006/main" xmlns:r="http://schemas.openxmlformats.org/officeDocument/2006/relationships" xmlns:mc="http://schemas.openxmlformats.org/markup-compatibility/2006" xmlns:mv="urn:schemas-microsoft-com:mac:vml" xmlns:p="http://schemas.openxmlformats.org/presentationml/2006/main" xmlns:c="http://schemas.openxmlformats.org/drawingml/2006/chart" xmlns:dgm="http://schemas.openxmlformats.org/drawingml/2006/diagram" xmlns:o="urn:schemas-microsoft-com:office:office" xmlns:v="urn:schemas-microsoft-com:vml" xmlns:pvml="urn:schemas-microsoft-com:office:powerpoint" xmlns:com="http://schemas.openxmlformats.org/drawingml/2006/compatibility" xmlns:p14="http://schemas.microsoft.com/office/powerpoint/2010/main" xmlns:p15="http://schemas.microsoft.com/office/powerpoint/2012/main" xmlns:ahyp="http://schemas.microsoft.com/office/drawing/2018/hyperlinkcolor">
+  <p:cSld>
+    <p:spTree>
+      <p:nvGrpSpPr>
+        <p:cNvPr id="290" name="Shape 290"/>
+        <p:cNvGrpSpPr/>
+        <p:nvPr/>
+      </p:nvGrpSpPr>
+      <p:grpSpPr>
+        <a:xfrm>
+          <a:off x="0" y="0"/>
+          <a:ext cx="0" cy="0"/>
+          <a:chOff x="0" y="0"/>
+          <a:chExt cx="0" cy="0"/>
+        </a:xfrm>
+      </p:grpSpPr>
+      <p:sp>
+        <p:nvSpPr>
+          <p:cNvPr id="291" name="Google Shape;291;p35"/>
           <p:cNvSpPr txBox="1"/>
           <p:nvPr>
             <p:ph type="title"/>
@@ -16266,32 +15997,13 @@
                 <a:spcPts val="0"/>
               </a:spcBef>
               <a:spcAft>
-                <a:spcPts val="0"/>
+                <a:spcPts val="800"/>
               </a:spcAft>
               <a:buNone/>
             </a:pPr>
             <a:r>
               <a:rPr lang="es" sz="1000"/>
-              <a:t>Desarrollar una herramienta tecnológica que proporcione información de rápido acceso para emergencias, mediante dos aplicaciones interconectadas; una que permita registrar la información de un domicilio y otra en la que bomberos puedan consultar esta información durante una emergencia. Además de permitir registrar la ubicación y el estado de los grifos de agua para visualizarlos en un mapa.</a:t>
-            </a:r>
-            <a:endParaRPr sz="1000"/>
-          </a:p>
-          <a:p>
-            <a:pPr indent="0" lvl="0" marL="0" rtl="0" algn="just">
-              <a:lnSpc>
-                <a:spcPct val="150000"/>
-              </a:lnSpc>
-              <a:spcBef>
-                <a:spcPts val="800"/>
-              </a:spcBef>
-              <a:spcAft>
-                <a:spcPts val="800"/>
-              </a:spcAft>
-              <a:buNone/>
-            </a:pPr>
-            <a:r>
-              <a:rPr lang="es" sz="1000"/>
-              <a:t>Desarrollar plataforma que centraliza información crítica de viviendas para apoyar la respuesta de Bomberos durante emergencias. </a:t>
+              <a:t>Desarrollar una herramienta tecnológica que proporcione información de rápido acceso para emergencias, mediante dos aplicaciones interconectadas.</a:t>
             </a:r>
             <a:endParaRPr sz="1000"/>
           </a:p>
@@ -16418,38 +16130,6 @@
             <a:noAutofit/>
           </a:bodyPr>
           <a:lstStyle/>
-          <a:p>
-            <a:pPr indent="-292100" lvl="0" marL="457200" rtl="0" algn="just">
-              <a:spcBef>
-                <a:spcPts val="0"/>
-              </a:spcBef>
-              <a:spcAft>
-                <a:spcPts val="0"/>
-              </a:spcAft>
-              <a:buSzPts val="1000"/>
-              <a:buAutoNum type="arabicPeriod"/>
-            </a:pPr>
-            <a:r>
-              <a:rPr lang="es" sz="1000"/>
-              <a:t>Aumento de la cantidad de información obtenida de una residencia para una emergencia en un 40% en el primer trimestre.</a:t>
-            </a:r>
-            <a:endParaRPr sz="1000"/>
-          </a:p>
-          <a:p>
-            <a:pPr indent="0" lvl="0" marL="457200" rtl="0" algn="just">
-              <a:spcBef>
-                <a:spcPts val="0"/>
-              </a:spcBef>
-              <a:spcAft>
-                <a:spcPts val="0"/>
-              </a:spcAft>
-              <a:buNone/>
-            </a:pPr>
-            <a:r>
-              <a:t/>
-            </a:r>
-            <a:endParaRPr sz="1000"/>
-          </a:p>
           <a:p>
             <a:pPr indent="-292100" lvl="0" marL="457200" rtl="0" algn="just">
               <a:spcBef>
